--- a/docs/pitch/TheAgentOrg-final.pptx
+++ b/docs/pitch/TheAgentOrg-final.pptx
@@ -8964,7 +8964,7 @@
                 </a:solidFill>
                 <a:latin typeface="Helvetica Neue"/>
               </a:rPr>
-              <a:t>Sign-in has never completed — it needs a database nobody has started here.</a:t>
+              <a:t>Sign-in has never completed — the tenant lookup is circular under our own rules.</a:t>
             </a:r>
           </a:p>
         </p:txBody>
@@ -9159,7 +9159,7 @@
                 </a:solidFill>
                 <a:latin typeface="Helvetica Neue"/>
               </a:rPr>
-              <a:t>Sixteen limitations are written down, each with what removing it would take. Every one is something unexecuted rather than something broken — and telling those two apart is the whole point of this project.</a:t>
+              <a:t>Sixteen limitations are written down, each with what removing it would take. Two were closed by another engineer within hours of being recorded — which is what writing them down is for.</a:t>
             </a:r>
           </a:p>
         </p:txBody>
@@ -9748,7 +9748,7 @@
                 </a:solidFill>
                 <a:latin typeface="Helvetica Neue"/>
               </a:rPr>
-              <a:t>TURN ON WHAT IS BUILT — the queue, the database, and cost on every run.</a:t>
+              <a:t>FINISH SWITCHING ON — the queue in production, and cost recorded on every run.</a:t>
             </a:r>
           </a:p>
         </p:txBody>

--- a/docs/pitch/TheAgentOrg-final.pptx
+++ b/docs/pitch/TheAgentOrg-final.pptx
@@ -4411,7 +4411,7 @@
                 </a:solidFill>
                 <a:latin typeface="Helvetica Neue"/>
               </a:rPr>
-              <a:t>1853</a:t>
+              <a:t>1860</a:t>
             </a:r>
           </a:p>
         </p:txBody>
@@ -5676,7 +5676,7 @@
                 </a:solidFill>
                 <a:latin typeface="Helvetica Neue"/>
               </a:rPr>
-              <a:t>20,475 lines of pipeline and 8,769 of application, under 1853 tests and 166 more for the web.</a:t>
+              <a:t>20,475 lines of pipeline and 8,769 of application, under 1860 tests and 166 more for the web.</a:t>
             </a:r>
           </a:p>
         </p:txBody>

--- a/docs/pitch/TheAgentOrg-final.pptx
+++ b/docs/pitch/TheAgentOrg-final.pptx
@@ -9159,7 +9159,7 @@
                 </a:solidFill>
                 <a:latin typeface="Helvetica Neue"/>
               </a:rPr>
-              <a:t>Sixteen limitations are written down, each with what removing it would take. Two were closed by another engineer within hours of being recorded — which is what writing them down is for.</a:t>
+              <a:t>Seventeen limitations are written down, each with what removing it would take. Two were closed by another engineer within hours of being recorded — which is what writing them down is for.</a:t>
             </a:r>
           </a:p>
         </p:txBody>
